--- a/docs/pptx/auc3/ritu-auc3-linsubhr-ratio-hosp4.pptx
+++ b/docs/pptx/auc3/ritu-auc3-linsubhr-ratio-hosp4.pptx
@@ -2350,7 +2350,7 @@
                   <a:latin typeface="Helvetica"/>
                   <a:cs typeface="Helvetica"/>
                 </a:rPr>
-                <a:t>(too few events among the 143 Local/Early patients)</a:t>
+                <a:t>(too few events among the 142 Local/Early patients)</a:t>
               </a:r>
             </a:p>
           </p:txBody>
@@ -2534,7 +2534,7 @@
                   <a:latin typeface="Helvetica"/>
                   <a:cs typeface="Helvetica"/>
                 </a:rPr>
-                <a:t>(too few events among the 143 Local/Early patients)</a:t>
+                <a:t>(too few events among the 142 Local/Early patients)</a:t>
               </a:r>
             </a:p>
           </p:txBody>
@@ -2672,7 +2672,7 @@
                   <a:latin typeface="Helvetica"/>
                   <a:cs typeface="Helvetica"/>
                 </a:rPr>
-                <a:t>number = 6.50813e-18</a:t>
+                <a:t>number = 1.32803e-17</a:t>
               </a:r>
             </a:p>
           </p:txBody>
